--- a/쿠팡_지마켓_11번가_261013_수정.pptx
+++ b/쿠팡_지마켓_11번가_261013_수정.pptx
@@ -23685,7 +23685,7 @@
                 <a:ea typeface="에이투지체 6 SemiBold"/>
                 <a:cs typeface="에이투지체 6 SemiBold"/>
               </a:rPr>
-              <a:t>11월에는 외부몰 1억 원 중 8,500만 원 배분을 제안하며, 리뷰가 쌓인 로켓 상품부터 성과를 확인합니다</a:t>
+              <a:t>캠페인마다 객단가에 맞는 목표 ROAS를 두고, 리뷰가 쌓인 로켓 상품부터 주 단위로 성과를 확인합니다</a:t>
             </a:r>
           </a:p>
         </p:txBody>
